--- a/ppt/BigData01-Intro.pptx
+++ b/ppt/BigData01-Intro.pptx
@@ -3730,8 +3730,8 @@
         </p:nvSpPr>
         <p:spPr>
           <a:xfrm>
-            <a:off x="3594808" y="2132856"/>
-            <a:ext cx="1954381" cy="646331"/>
+            <a:off x="3107495" y="2015351"/>
+            <a:ext cx="2929007" cy="1200329"/>
           </a:xfrm>
           <a:prstGeom prst="rect">
             <a:avLst/>
@@ -3744,13 +3744,17 @@
           </a:bodyPr>
           <a:lstStyle/>
           <a:p>
-            <a:r>
-              <a:rPr lang="fr-FR" sz="3600" dirty="0" err="1"/>
-              <a:t>Big</a:t>
-            </a:r>
+            <a:pPr algn="ctr"/>
             <a:r>
               <a:rPr lang="fr-FR" sz="3600" dirty="0"/>
-              <a:t> Data</a:t>
+              <a:t>Big Data</a:t>
+            </a:r>
+          </a:p>
+          <a:p>
+            <a:pPr algn="ctr"/>
+            <a:r>
+              <a:rPr lang="fr-FR" sz="3600" dirty="0"/>
+              <a:t>Data Science</a:t>
             </a:r>
           </a:p>
         </p:txBody>
